--- a/ゲーム科1年/00_前期/ゲームプログラミングⅢ/ゲーム数学/実習/02_放物線移動.pptx
+++ b/ゲーム科1年/00_前期/ゲームプログラミングⅢ/ゲーム数学/実習/02_放物線移動.pptx
@@ -264,7 +264,7 @@
           <a:p>
             <a:fld id="{E9CC885B-4903-4D54-9A93-00025F12DED9}" type="datetimeFigureOut">
               <a:rPr kumimoji="1" lang="ja-JP" altLang="en-US" smtClean="0"/>
-              <a:t>2024/12/4</a:t>
+              <a:t>2026/2/19</a:t>
             </a:fld>
             <a:endParaRPr kumimoji="1" lang="ja-JP" altLang="en-US"/>
           </a:p>
@@ -494,7 +494,7 @@
           <a:p>
             <a:fld id="{E9CC885B-4903-4D54-9A93-00025F12DED9}" type="datetimeFigureOut">
               <a:rPr kumimoji="1" lang="ja-JP" altLang="en-US" smtClean="0"/>
-              <a:t>2024/12/4</a:t>
+              <a:t>2026/2/19</a:t>
             </a:fld>
             <a:endParaRPr kumimoji="1" lang="ja-JP" altLang="en-US"/>
           </a:p>
@@ -734,7 +734,7 @@
           <a:p>
             <a:fld id="{E9CC885B-4903-4D54-9A93-00025F12DED9}" type="datetimeFigureOut">
               <a:rPr kumimoji="1" lang="ja-JP" altLang="en-US" smtClean="0"/>
-              <a:t>2024/12/4</a:t>
+              <a:t>2026/2/19</a:t>
             </a:fld>
             <a:endParaRPr kumimoji="1" lang="ja-JP" altLang="en-US"/>
           </a:p>
@@ -964,7 +964,7 @@
           <a:p>
             <a:fld id="{E9CC885B-4903-4D54-9A93-00025F12DED9}" type="datetimeFigureOut">
               <a:rPr kumimoji="1" lang="ja-JP" altLang="en-US" smtClean="0"/>
-              <a:t>2024/12/4</a:t>
+              <a:t>2026/2/19</a:t>
             </a:fld>
             <a:endParaRPr kumimoji="1" lang="ja-JP" altLang="en-US"/>
           </a:p>
@@ -1239,7 +1239,7 @@
           <a:p>
             <a:fld id="{E9CC885B-4903-4D54-9A93-00025F12DED9}" type="datetimeFigureOut">
               <a:rPr kumimoji="1" lang="ja-JP" altLang="en-US" smtClean="0"/>
-              <a:t>2024/12/4</a:t>
+              <a:t>2026/2/19</a:t>
             </a:fld>
             <a:endParaRPr kumimoji="1" lang="ja-JP" altLang="en-US"/>
           </a:p>
@@ -1568,7 +1568,7 @@
           <a:p>
             <a:fld id="{E9CC885B-4903-4D54-9A93-00025F12DED9}" type="datetimeFigureOut">
               <a:rPr kumimoji="1" lang="ja-JP" altLang="en-US" smtClean="0"/>
-              <a:t>2024/12/4</a:t>
+              <a:t>2026/2/19</a:t>
             </a:fld>
             <a:endParaRPr kumimoji="1" lang="ja-JP" altLang="en-US"/>
           </a:p>
@@ -2044,7 +2044,7 @@
           <a:p>
             <a:fld id="{E9CC885B-4903-4D54-9A93-00025F12DED9}" type="datetimeFigureOut">
               <a:rPr kumimoji="1" lang="ja-JP" altLang="en-US" smtClean="0"/>
-              <a:t>2024/12/4</a:t>
+              <a:t>2026/2/19</a:t>
             </a:fld>
             <a:endParaRPr kumimoji="1" lang="ja-JP" altLang="en-US"/>
           </a:p>
@@ -2185,7 +2185,7 @@
           <a:p>
             <a:fld id="{E9CC885B-4903-4D54-9A93-00025F12DED9}" type="datetimeFigureOut">
               <a:rPr kumimoji="1" lang="ja-JP" altLang="en-US" smtClean="0"/>
-              <a:t>2024/12/4</a:t>
+              <a:t>2026/2/19</a:t>
             </a:fld>
             <a:endParaRPr kumimoji="1" lang="ja-JP" altLang="en-US"/>
           </a:p>
@@ -2298,7 +2298,7 @@
           <a:p>
             <a:fld id="{E9CC885B-4903-4D54-9A93-00025F12DED9}" type="datetimeFigureOut">
               <a:rPr kumimoji="1" lang="ja-JP" altLang="en-US" smtClean="0"/>
-              <a:t>2024/12/4</a:t>
+              <a:t>2026/2/19</a:t>
             </a:fld>
             <a:endParaRPr kumimoji="1" lang="ja-JP" altLang="en-US"/>
           </a:p>
@@ -2641,7 +2641,7 @@
           <a:p>
             <a:fld id="{E9CC885B-4903-4D54-9A93-00025F12DED9}" type="datetimeFigureOut">
               <a:rPr kumimoji="1" lang="ja-JP" altLang="en-US" smtClean="0"/>
-              <a:t>2024/12/4</a:t>
+              <a:t>2026/2/19</a:t>
             </a:fld>
             <a:endParaRPr kumimoji="1" lang="ja-JP" altLang="en-US"/>
           </a:p>
@@ -2929,7 +2929,7 @@
           <a:p>
             <a:fld id="{E9CC885B-4903-4D54-9A93-00025F12DED9}" type="datetimeFigureOut">
               <a:rPr kumimoji="1" lang="ja-JP" altLang="en-US" smtClean="0"/>
-              <a:t>2024/12/4</a:t>
+              <a:t>2026/2/19</a:t>
             </a:fld>
             <a:endParaRPr kumimoji="1" lang="ja-JP" altLang="en-US"/>
           </a:p>
@@ -3202,7 +3202,7 @@
           <a:p>
             <a:fld id="{E9CC885B-4903-4D54-9A93-00025F12DED9}" type="datetimeFigureOut">
               <a:rPr kumimoji="1" lang="ja-JP" altLang="en-US" smtClean="0"/>
-              <a:t>2024/12/4</a:t>
+              <a:t>2026/2/19</a:t>
             </a:fld>
             <a:endParaRPr kumimoji="1" lang="ja-JP" altLang="en-US"/>
           </a:p>
@@ -4236,7 +4236,7 @@
         <p:spPr>
           <a:xfrm>
             <a:off x="567542" y="1216429"/>
-            <a:ext cx="7885492" cy="461665"/>
+            <a:ext cx="8706230" cy="461665"/>
           </a:xfrm>
           <a:prstGeom prst="rect">
             <a:avLst/>
@@ -4255,7 +4255,7 @@
                   <a:srgbClr val="FF0000"/>
                 </a:solidFill>
               </a:rPr>
-              <a:t>ArchBlock.cpp</a:t>
+              <a:t>ArchMoveBlock.cpp</a:t>
             </a:r>
             <a:r>
               <a:rPr kumimoji="1" lang="ja-JP" altLang="en-US" sz="2400" dirty="0"/>
@@ -4267,10 +4267,10 @@
       </p:sp>
       <p:pic>
         <p:nvPicPr>
-          <p:cNvPr id="3" name="図 2">
-            <a:extLst>
-              <a:ext uri="{FF2B5EF4-FFF2-40B4-BE49-F238E27FC236}">
-                <a16:creationId xmlns:a16="http://schemas.microsoft.com/office/drawing/2014/main" id="{ED7B26EA-60FA-4523-8A80-54A04FEF5140}"/>
+          <p:cNvPr id="8" name="図 7">
+            <a:extLst>
+              <a:ext uri="{FF2B5EF4-FFF2-40B4-BE49-F238E27FC236}">
+                <a16:creationId xmlns:a16="http://schemas.microsoft.com/office/drawing/2014/main" id="{6293AC7A-0E06-4F4C-A73B-74B9D8E8819C}"/>
               </a:ext>
             </a:extLst>
           </p:cNvPr>
@@ -4287,118 +4287,14 @@
         </p:blipFill>
         <p:spPr>
           <a:xfrm>
-            <a:off x="595210" y="1817794"/>
-            <a:ext cx="7724775" cy="4743450"/>
+            <a:off x="567542" y="1817794"/>
+            <a:ext cx="8301868" cy="4548252"/>
           </a:xfrm>
           <a:prstGeom prst="rect">
             <a:avLst/>
           </a:prstGeom>
         </p:spPr>
       </p:pic>
-      <p:sp>
-        <p:nvSpPr>
-          <p:cNvPr id="5" name="正方形/長方形 4">
-            <a:extLst>
-              <a:ext uri="{FF2B5EF4-FFF2-40B4-BE49-F238E27FC236}">
-                <a16:creationId xmlns:a16="http://schemas.microsoft.com/office/drawing/2014/main" id="{2EF33286-384A-45A1-AAC4-CF9B4A5A2893}"/>
-              </a:ext>
-            </a:extLst>
-          </p:cNvPr>
-          <p:cNvSpPr/>
-          <p:nvPr/>
-        </p:nvSpPr>
-        <p:spPr>
-          <a:xfrm>
-            <a:off x="1922318" y="4416137"/>
-            <a:ext cx="6650182" cy="342900"/>
-          </a:xfrm>
-          <a:prstGeom prst="rect">
-            <a:avLst/>
-          </a:prstGeom>
-          <a:noFill/>
-          <a:ln w="38100">
-            <a:solidFill>
-              <a:srgbClr val="FF0000"/>
-            </a:solidFill>
-          </a:ln>
-        </p:spPr>
-        <p:style>
-          <a:lnRef idx="2">
-            <a:schemeClr val="accent1">
-              <a:shade val="50000"/>
-            </a:schemeClr>
-          </a:lnRef>
-          <a:fillRef idx="1">
-            <a:schemeClr val="accent1"/>
-          </a:fillRef>
-          <a:effectRef idx="0">
-            <a:schemeClr val="accent1"/>
-          </a:effectRef>
-          <a:fontRef idx="minor">
-            <a:schemeClr val="lt1"/>
-          </a:fontRef>
-        </p:style>
-        <p:txBody>
-          <a:bodyPr rtlCol="0" anchor="ctr"/>
-          <a:lstStyle/>
-          <a:p>
-            <a:pPr algn="ctr"/>
-            <a:endParaRPr kumimoji="1" lang="ja-JP" altLang="en-US"/>
-          </a:p>
-        </p:txBody>
-      </p:sp>
-      <p:sp>
-        <p:nvSpPr>
-          <p:cNvPr id="7" name="正方形/長方形 6">
-            <a:extLst>
-              <a:ext uri="{FF2B5EF4-FFF2-40B4-BE49-F238E27FC236}">
-                <a16:creationId xmlns:a16="http://schemas.microsoft.com/office/drawing/2014/main" id="{1F8CD18B-A2E9-4D76-8299-3AB9733ED841}"/>
-              </a:ext>
-            </a:extLst>
-          </p:cNvPr>
-          <p:cNvSpPr/>
-          <p:nvPr/>
-        </p:nvSpPr>
-        <p:spPr>
-          <a:xfrm>
-            <a:off x="1908794" y="5046519"/>
-            <a:ext cx="6650182" cy="342900"/>
-          </a:xfrm>
-          <a:prstGeom prst="rect">
-            <a:avLst/>
-          </a:prstGeom>
-          <a:noFill/>
-          <a:ln w="38100">
-            <a:solidFill>
-              <a:srgbClr val="FF0000"/>
-            </a:solidFill>
-          </a:ln>
-        </p:spPr>
-        <p:style>
-          <a:lnRef idx="2">
-            <a:schemeClr val="accent1">
-              <a:shade val="50000"/>
-            </a:schemeClr>
-          </a:lnRef>
-          <a:fillRef idx="1">
-            <a:schemeClr val="accent1"/>
-          </a:fillRef>
-          <a:effectRef idx="0">
-            <a:schemeClr val="accent1"/>
-          </a:effectRef>
-          <a:fontRef idx="minor">
-            <a:schemeClr val="lt1"/>
-          </a:fontRef>
-        </p:style>
-        <p:txBody>
-          <a:bodyPr rtlCol="0" anchor="ctr"/>
-          <a:lstStyle/>
-          <a:p>
-            <a:pPr algn="ctr"/>
-            <a:endParaRPr kumimoji="1" lang="ja-JP" altLang="en-US"/>
-          </a:p>
-        </p:txBody>
-      </p:sp>
     </p:spTree>
     <p:extLst>
       <p:ext uri="{BB962C8B-B14F-4D97-AF65-F5344CB8AC3E}">
@@ -4464,8 +4360,8 @@
           </a:p>
         </p:txBody>
       </p:sp>
-      <mc:AlternateContent xmlns:mc="http://schemas.openxmlformats.org/markup-compatibility/2006">
-        <mc:Choice xmlns:a14="http://schemas.microsoft.com/office/drawing/2010/main" Requires="a14">
+      <mc:AlternateContent xmlns:mc="http://schemas.openxmlformats.org/markup-compatibility/2006" xmlns:a14="http://schemas.microsoft.com/office/drawing/2010/main">
+        <mc:Choice Requires="a14">
           <p:sp>
             <p:nvSpPr>
               <p:cNvPr id="6" name="テキスト ボックス 5">
@@ -4712,7 +4608,7 @@
             </p:txBody>
           </p:sp>
         </mc:Choice>
-        <mc:Fallback>
+        <mc:Fallback xmlns="">
           <p:sp>
             <p:nvSpPr>
               <p:cNvPr id="6" name="テキスト ボックス 5">
